--- a/word-drafts/figures/AAS-Fig15-EnvironmentDocument.pptx
+++ b/word-drafts/figures/AAS-Fig15-EnvironmentDocument.pptx
@@ -3642,7 +3642,7 @@
         <p:spPr>
           <a:xfrm>
             <a:off x="4595812" y="1228725"/>
-            <a:ext cx="485775" cy="123825"/>
+            <a:ext cx="609600" cy="123825"/>
           </a:xfrm>
           <a:prstGeom prst="rect">
             <a:avLst/>
@@ -3714,7 +3714,7 @@
         <p:spPr>
           <a:xfrm>
             <a:off x="5881687" y="2314575"/>
-            <a:ext cx="485775" cy="123825"/>
+            <a:ext cx="609600" cy="123825"/>
           </a:xfrm>
           <a:prstGeom prst="rect">
             <a:avLst/>
@@ -3786,7 +3786,7 @@
         <p:spPr>
           <a:xfrm>
             <a:off x="5238750" y="2314575"/>
-            <a:ext cx="428625" cy="123825"/>
+            <a:ext cx="533400" cy="123825"/>
           </a:xfrm>
           <a:prstGeom prst="rect">
             <a:avLst/>
@@ -3897,7 +3897,7 @@
         <p:spPr>
           <a:xfrm>
             <a:off x="3309937" y="4486275"/>
-            <a:ext cx="495300" cy="123825"/>
+            <a:ext cx="619125" cy="123825"/>
           </a:xfrm>
           <a:prstGeom prst="rect">
             <a:avLst/>
@@ -3969,7 +3969,7 @@
         <p:spPr>
           <a:xfrm>
             <a:off x="4595812" y="4486275"/>
-            <a:ext cx="495300" cy="123825"/>
+            <a:ext cx="619125" cy="123825"/>
           </a:xfrm>
           <a:prstGeom prst="rect">
             <a:avLst/>
@@ -4041,7 +4041,7 @@
         <p:spPr>
           <a:xfrm>
             <a:off x="5881687" y="4486275"/>
-            <a:ext cx="495300" cy="123825"/>
+            <a:ext cx="619125" cy="123825"/>
           </a:xfrm>
           <a:prstGeom prst="rect">
             <a:avLst/>
@@ -4113,7 +4113,7 @@
         <p:spPr>
           <a:xfrm>
             <a:off x="7167562" y="4486275"/>
-            <a:ext cx="495300" cy="123825"/>
+            <a:ext cx="619125" cy="123825"/>
           </a:xfrm>
           <a:prstGeom prst="rect">
             <a:avLst/>
